--- a/dist/gstack-tutorial-3_ZH.pptx
+++ b/dist/gstack-tutorial-3_ZH.pptx
@@ -3423,7 +3423,7 @@
                 <a:ea typeface="Microsoft YaHei"/>
                 <a:cs typeface="Microsoft YaHei"/>
               </a:rPr>
-              <a:t>李奕锟 教授  ·  2026 年 9 月</a:t>
+              <a:t>李贻昆教授  ·  2026 年 9 月</a:t>
             </a:r>
           </a:p>
           <a:p>
